--- a/prompt-engineering-course/prompt_engineering_presentation_support/PE_S6_context-tools-memory.pptx
+++ b/prompt-engineering-course/prompt_engineering_presentation_support/PE_S6_context-tools-memory.pptx
@@ -2317,8 +2317,47 @@
         </p:nvSpPr>
         <p:spPr>
           <a:xfrm>
-            <a:off x="548640" y="2011680"/>
-            <a:ext cx="6126480" cy="3840480"/>
+            <a:off x="548640" y="1627632"/>
+            <a:ext cx="10881360" cy="502920"/>
+          </a:xfrm>
+          <a:prstGeom prst="rect">
+            <a:avLst/>
+          </a:prstGeom>
+          <a:noFill/>
+          <a:ln/>
+        </p:spPr>
+        <p:txBody>
+          <a:bodyPr wrap="square" lIns="0" tIns="0" rIns="0" bIns="0" rtlCol="0" anchor="t"/>
+          <a:lstStyle/>
+          <a:p>
+            <a:pPr algn="l" indent="0" marL="0">
+              <a:buNone/>
+            </a:pPr>
+            <a:r>
+              <a:rPr lang="en-US" sz="1500" dirty="0">
+                <a:solidFill>
+                  <a:srgbClr val="A9B1D6"/>
+                </a:solidFill>
+                <a:latin typeface="Calibri" pitchFamily="34" charset="0"/>
+                <a:ea typeface="Calibri" pitchFamily="34" charset="-122"/>
+                <a:cs typeface="Calibri" pitchFamily="34" charset="-120"/>
+              </a:rPr>
+              <a:t>An agent is really just a loop steered by prompts — good news, because prompts are what you already know how to fix.</a:t>
+            </a:r>
+            <a:endParaRPr lang="en-US" sz="1500" dirty="0"/>
+          </a:p>
+        </p:txBody>
+      </p:sp>
+      <p:sp>
+        <p:nvSpPr>
+          <p:cNvPr id="5" name="Text 3"/>
+          <p:cNvSpPr txBox="1"/>
+          <p:nvPr/>
+        </p:nvSpPr>
+        <p:spPr>
+          <a:xfrm>
+            <a:off x="548640" y="2340864"/>
+            <a:ext cx="6126480" cy="3511296"/>
           </a:xfrm>
           <a:prstGeom prst="rect">
             <a:avLst/>
@@ -2456,18 +2495,18 @@
       </p:sp>
       <p:sp>
         <p:nvSpPr>
-          <p:cNvPr id="5" name="Shape 3"/>
+          <p:cNvPr id="6" name="Shape 4"/>
           <p:cNvSpPr/>
           <p:nvPr/>
         </p:nvSpPr>
         <p:spPr>
           <a:xfrm>
-            <a:off x="6995160" y="2148840"/>
-            <a:ext cx="4645152" cy="3383280"/>
+            <a:off x="6995160" y="2478024"/>
+            <a:ext cx="4645152" cy="3054096"/>
           </a:xfrm>
           <a:prstGeom prst="roundRect">
             <a:avLst>
-              <a:gd name="adj" fmla="val 2432"/>
+              <a:gd name="adj" fmla="val 2695"/>
             </a:avLst>
           </a:prstGeom>
           <a:solidFill>
@@ -2483,13 +2522,13 @@
       </p:sp>
       <p:sp>
         <p:nvSpPr>
-          <p:cNvPr id="6" name="Shape 4"/>
+          <p:cNvPr id="7" name="Shape 5"/>
           <p:cNvSpPr/>
           <p:nvPr/>
         </p:nvSpPr>
         <p:spPr>
           <a:xfrm>
-            <a:off x="7269480" y="2423160"/>
+            <a:off x="7269480" y="2752344"/>
             <a:ext cx="457200" cy="457200"/>
           </a:xfrm>
           <a:prstGeom prst="ellipse">
@@ -2503,13 +2542,13 @@
       </p:sp>
       <p:sp>
         <p:nvSpPr>
-          <p:cNvPr id="7" name="Text 5"/>
-          <p:cNvSpPr txBox="1"/>
-          <p:nvPr/>
-        </p:nvSpPr>
-        <p:spPr>
-          <a:xfrm>
-            <a:off x="7818120" y="2450592"/>
+          <p:cNvPr id="8" name="Text 6"/>
+          <p:cNvSpPr txBox="1"/>
+          <p:nvPr/>
+        </p:nvSpPr>
+        <p:spPr>
+          <a:xfrm>
+            <a:off x="7818120" y="2779776"/>
             <a:ext cx="3657600" cy="411480"/>
           </a:xfrm>
           <a:prstGeom prst="rect">
@@ -2542,14 +2581,14 @@
       </p:sp>
       <p:sp>
         <p:nvSpPr>
-          <p:cNvPr id="8" name="Text 6"/>
-          <p:cNvSpPr txBox="1"/>
-          <p:nvPr/>
-        </p:nvSpPr>
-        <p:spPr>
-          <a:xfrm>
-            <a:off x="7269480" y="3108960"/>
-            <a:ext cx="4160520" cy="2286000"/>
+          <p:cNvPr id="9" name="Text 7"/>
+          <p:cNvSpPr txBox="1"/>
+          <p:nvPr/>
+        </p:nvSpPr>
+        <p:spPr>
+          <a:xfrm>
+            <a:off x="7269480" y="3438144"/>
+            <a:ext cx="4160520" cy="1865376"/>
           </a:xfrm>
           <a:prstGeom prst="rect">
             <a:avLst/>
@@ -2581,7 +2620,7 @@
       </p:sp>
       <p:sp>
         <p:nvSpPr>
-          <p:cNvPr id="9" name="Shape 7"/>
+          <p:cNvPr id="10" name="Shape 8"/>
           <p:cNvSpPr/>
           <p:nvPr/>
         </p:nvSpPr>
@@ -2603,7 +2642,7 @@
       </p:sp>
       <p:sp>
         <p:nvSpPr>
-          <p:cNvPr id="10" name="Text 8"/>
+          <p:cNvPr id="11" name="Text 9"/>
           <p:cNvSpPr txBox="1"/>
           <p:nvPr/>
         </p:nvSpPr>
@@ -2642,7 +2681,7 @@
       </p:sp>
       <p:sp>
         <p:nvSpPr>
-          <p:cNvPr id="11" name="Text 9"/>
+          <p:cNvPr id="12" name="Text 10"/>
           <p:cNvSpPr txBox="1"/>
           <p:nvPr/>
         </p:nvSpPr>
@@ -2681,7 +2720,7 @@
       </p:sp>
       <p:sp>
         <p:nvSpPr>
-          <p:cNvPr id="12" name="Text 10"/>
+          <p:cNvPr id="13" name="Text 11"/>
           <p:cNvSpPr txBox="1"/>
           <p:nvPr/>
         </p:nvSpPr>
@@ -3519,13 +3558,52 @@
       </p:sp>
       <p:sp>
         <p:nvSpPr>
-          <p:cNvPr id="4" name="Shape 2"/>
+          <p:cNvPr id="4" name="Text 2"/>
+          <p:cNvSpPr txBox="1"/>
+          <p:nvPr/>
+        </p:nvSpPr>
+        <p:spPr>
+          <a:xfrm>
+            <a:off x="548640" y="1627632"/>
+            <a:ext cx="10881360" cy="502920"/>
+          </a:xfrm>
+          <a:prstGeom prst="rect">
+            <a:avLst/>
+          </a:prstGeom>
+          <a:noFill/>
+          <a:ln/>
+        </p:spPr>
+        <p:txBody>
+          <a:bodyPr wrap="square" lIns="0" tIns="0" rIns="0" bIns="0" rtlCol="0" anchor="t"/>
+          <a:lstStyle/>
+          <a:p>
+            <a:pPr algn="l" indent="0" marL="0">
+              <a:buNone/>
+            </a:pPr>
+            <a:r>
+              <a:rPr lang="en-US" sz="1500" dirty="0">
+                <a:solidFill>
+                  <a:srgbClr val="A9B1D6"/>
+                </a:solidFill>
+                <a:latin typeface="Calibri" pitchFamily="34" charset="0"/>
+                <a:ea typeface="Calibri" pitchFamily="34" charset="-122"/>
+                <a:cs typeface="Calibri" pitchFamily="34" charset="-120"/>
+              </a:rPr>
+              <a:t>Time to point all of this at something real — here's what you'll build and present.</a:t>
+            </a:r>
+            <a:endParaRPr lang="en-US" sz="1500" dirty="0"/>
+          </a:p>
+        </p:txBody>
+      </p:sp>
+      <p:sp>
+        <p:nvSpPr>
+          <p:cNvPr id="5" name="Shape 3"/>
           <p:cNvSpPr/>
           <p:nvPr/>
         </p:nvSpPr>
         <p:spPr>
           <a:xfrm>
-            <a:off x="548640" y="2103120"/>
+            <a:off x="548640" y="2432304"/>
             <a:ext cx="530352" cy="530352"/>
           </a:xfrm>
           <a:prstGeom prst="ellipse">
@@ -3539,13 +3617,13 @@
       </p:sp>
       <p:sp>
         <p:nvSpPr>
-          <p:cNvPr id="5" name="Text 3"/>
-          <p:cNvSpPr txBox="1"/>
-          <p:nvPr/>
-        </p:nvSpPr>
-        <p:spPr>
-          <a:xfrm>
-            <a:off x="548640" y="2103120"/>
+          <p:cNvPr id="6" name="Text 4"/>
+          <p:cNvSpPr txBox="1"/>
+          <p:nvPr/>
+        </p:nvSpPr>
+        <p:spPr>
+          <a:xfrm>
+            <a:off x="548640" y="2432304"/>
             <a:ext cx="530352" cy="530352"/>
           </a:xfrm>
           <a:prstGeom prst="rect">
@@ -3578,13 +3656,13 @@
       </p:sp>
       <p:sp>
         <p:nvSpPr>
-          <p:cNvPr id="6" name="Text 4"/>
-          <p:cNvSpPr txBox="1"/>
-          <p:nvPr/>
-        </p:nvSpPr>
-        <p:spPr>
-          <a:xfrm>
-            <a:off x="1325880" y="2084832"/>
+          <p:cNvPr id="7" name="Text 5"/>
+          <p:cNvSpPr txBox="1"/>
+          <p:nvPr/>
+        </p:nvSpPr>
+        <p:spPr>
+          <a:xfrm>
+            <a:off x="1325880" y="2414016"/>
             <a:ext cx="10424160" cy="411480"/>
           </a:xfrm>
           <a:prstGeom prst="rect">
@@ -3617,14 +3695,14 @@
       </p:sp>
       <p:sp>
         <p:nvSpPr>
-          <p:cNvPr id="7" name="Text 5"/>
-          <p:cNvSpPr txBox="1"/>
-          <p:nvPr/>
-        </p:nvSpPr>
-        <p:spPr>
-          <a:xfrm>
-            <a:off x="1325880" y="2468880"/>
-            <a:ext cx="10424160" cy="667512"/>
+          <p:cNvPr id="8" name="Text 6"/>
+          <p:cNvSpPr txBox="1"/>
+          <p:nvPr/>
+        </p:nvSpPr>
+        <p:spPr>
+          <a:xfrm>
+            <a:off x="1325880" y="2798064"/>
+            <a:ext cx="10424160" cy="585216"/>
           </a:xfrm>
           <a:prstGeom prst="rect">
             <a:avLst/>
@@ -3656,13 +3734,13 @@
       </p:sp>
       <p:sp>
         <p:nvSpPr>
-          <p:cNvPr id="8" name="Shape 6"/>
+          <p:cNvPr id="9" name="Shape 7"/>
           <p:cNvSpPr/>
           <p:nvPr/>
         </p:nvSpPr>
         <p:spPr>
           <a:xfrm>
-            <a:off x="548640" y="3209544"/>
+            <a:off x="548640" y="3456432"/>
             <a:ext cx="530352" cy="530352"/>
           </a:xfrm>
           <a:prstGeom prst="ellipse">
@@ -3676,13 +3754,13 @@
       </p:sp>
       <p:sp>
         <p:nvSpPr>
-          <p:cNvPr id="9" name="Text 7"/>
-          <p:cNvSpPr txBox="1"/>
-          <p:nvPr/>
-        </p:nvSpPr>
-        <p:spPr>
-          <a:xfrm>
-            <a:off x="548640" y="3209544"/>
+          <p:cNvPr id="10" name="Text 8"/>
+          <p:cNvSpPr txBox="1"/>
+          <p:nvPr/>
+        </p:nvSpPr>
+        <p:spPr>
+          <a:xfrm>
+            <a:off x="548640" y="3456432"/>
             <a:ext cx="530352" cy="530352"/>
           </a:xfrm>
           <a:prstGeom prst="rect">
@@ -3715,13 +3793,13 @@
       </p:sp>
       <p:sp>
         <p:nvSpPr>
-          <p:cNvPr id="10" name="Text 8"/>
-          <p:cNvSpPr txBox="1"/>
-          <p:nvPr/>
-        </p:nvSpPr>
-        <p:spPr>
-          <a:xfrm>
-            <a:off x="1325880" y="3191256"/>
+          <p:cNvPr id="11" name="Text 9"/>
+          <p:cNvSpPr txBox="1"/>
+          <p:nvPr/>
+        </p:nvSpPr>
+        <p:spPr>
+          <a:xfrm>
+            <a:off x="1325880" y="3438144"/>
             <a:ext cx="10424160" cy="411480"/>
           </a:xfrm>
           <a:prstGeom prst="rect">
@@ -3754,14 +3832,14 @@
       </p:sp>
       <p:sp>
         <p:nvSpPr>
-          <p:cNvPr id="11" name="Text 9"/>
-          <p:cNvSpPr txBox="1"/>
-          <p:nvPr/>
-        </p:nvSpPr>
-        <p:spPr>
-          <a:xfrm>
-            <a:off x="1325880" y="3575304"/>
-            <a:ext cx="10424160" cy="667512"/>
+          <p:cNvPr id="12" name="Text 10"/>
+          <p:cNvSpPr txBox="1"/>
+          <p:nvPr/>
+        </p:nvSpPr>
+        <p:spPr>
+          <a:xfrm>
+            <a:off x="1325880" y="3822192"/>
+            <a:ext cx="10424160" cy="585216"/>
           </a:xfrm>
           <a:prstGeom prst="rect">
             <a:avLst/>
@@ -3793,13 +3871,13 @@
       </p:sp>
       <p:sp>
         <p:nvSpPr>
-          <p:cNvPr id="12" name="Shape 10"/>
+          <p:cNvPr id="13" name="Shape 11"/>
           <p:cNvSpPr/>
           <p:nvPr/>
         </p:nvSpPr>
         <p:spPr>
           <a:xfrm>
-            <a:off x="548640" y="4315968"/>
+            <a:off x="548640" y="4480560"/>
             <a:ext cx="530352" cy="530352"/>
           </a:xfrm>
           <a:prstGeom prst="ellipse">
@@ -3813,13 +3891,13 @@
       </p:sp>
       <p:sp>
         <p:nvSpPr>
-          <p:cNvPr id="13" name="Text 11"/>
-          <p:cNvSpPr txBox="1"/>
-          <p:nvPr/>
-        </p:nvSpPr>
-        <p:spPr>
-          <a:xfrm>
-            <a:off x="548640" y="4315968"/>
+          <p:cNvPr id="14" name="Text 12"/>
+          <p:cNvSpPr txBox="1"/>
+          <p:nvPr/>
+        </p:nvSpPr>
+        <p:spPr>
+          <a:xfrm>
+            <a:off x="548640" y="4480560"/>
             <a:ext cx="530352" cy="530352"/>
           </a:xfrm>
           <a:prstGeom prst="rect">
@@ -3852,13 +3930,13 @@
       </p:sp>
       <p:sp>
         <p:nvSpPr>
-          <p:cNvPr id="14" name="Text 12"/>
-          <p:cNvSpPr txBox="1"/>
-          <p:nvPr/>
-        </p:nvSpPr>
-        <p:spPr>
-          <a:xfrm>
-            <a:off x="1325880" y="4297680"/>
+          <p:cNvPr id="15" name="Text 13"/>
+          <p:cNvSpPr txBox="1"/>
+          <p:nvPr/>
+        </p:nvSpPr>
+        <p:spPr>
+          <a:xfrm>
+            <a:off x="1325880" y="4462272"/>
             <a:ext cx="10424160" cy="411480"/>
           </a:xfrm>
           <a:prstGeom prst="rect">
@@ -3891,14 +3969,14 @@
       </p:sp>
       <p:sp>
         <p:nvSpPr>
-          <p:cNvPr id="15" name="Text 13"/>
-          <p:cNvSpPr txBox="1"/>
-          <p:nvPr/>
-        </p:nvSpPr>
-        <p:spPr>
-          <a:xfrm>
-            <a:off x="1325880" y="4681728"/>
-            <a:ext cx="10424160" cy="667512"/>
+          <p:cNvPr id="16" name="Text 14"/>
+          <p:cNvSpPr txBox="1"/>
+          <p:nvPr/>
+        </p:nvSpPr>
+        <p:spPr>
+          <a:xfrm>
+            <a:off x="1325880" y="4846320"/>
+            <a:ext cx="10424160" cy="585216"/>
           </a:xfrm>
           <a:prstGeom prst="rect">
             <a:avLst/>
@@ -3930,13 +4008,13 @@
       </p:sp>
       <p:sp>
         <p:nvSpPr>
-          <p:cNvPr id="16" name="Shape 14"/>
+          <p:cNvPr id="17" name="Shape 15"/>
           <p:cNvSpPr/>
           <p:nvPr/>
         </p:nvSpPr>
         <p:spPr>
           <a:xfrm>
-            <a:off x="548640" y="5422392"/>
+            <a:off x="548640" y="5504688"/>
             <a:ext cx="530352" cy="530352"/>
           </a:xfrm>
           <a:prstGeom prst="ellipse">
@@ -3950,13 +4028,13 @@
       </p:sp>
       <p:sp>
         <p:nvSpPr>
-          <p:cNvPr id="17" name="Text 15"/>
-          <p:cNvSpPr txBox="1"/>
-          <p:nvPr/>
-        </p:nvSpPr>
-        <p:spPr>
-          <a:xfrm>
-            <a:off x="548640" y="5422392"/>
+          <p:cNvPr id="18" name="Text 16"/>
+          <p:cNvSpPr txBox="1"/>
+          <p:nvPr/>
+        </p:nvSpPr>
+        <p:spPr>
+          <a:xfrm>
+            <a:off x="548640" y="5504688"/>
             <a:ext cx="530352" cy="530352"/>
           </a:xfrm>
           <a:prstGeom prst="rect">
@@ -3989,13 +4067,13 @@
       </p:sp>
       <p:sp>
         <p:nvSpPr>
-          <p:cNvPr id="18" name="Text 16"/>
-          <p:cNvSpPr txBox="1"/>
-          <p:nvPr/>
-        </p:nvSpPr>
-        <p:spPr>
-          <a:xfrm>
-            <a:off x="1325880" y="5404104"/>
+          <p:cNvPr id="19" name="Text 17"/>
+          <p:cNvSpPr txBox="1"/>
+          <p:nvPr/>
+        </p:nvSpPr>
+        <p:spPr>
+          <a:xfrm>
+            <a:off x="1325880" y="5486400"/>
             <a:ext cx="10424160" cy="411480"/>
           </a:xfrm>
           <a:prstGeom prst="rect">
@@ -4028,14 +4106,14 @@
       </p:sp>
       <p:sp>
         <p:nvSpPr>
-          <p:cNvPr id="19" name="Text 17"/>
-          <p:cNvSpPr txBox="1"/>
-          <p:nvPr/>
-        </p:nvSpPr>
-        <p:spPr>
-          <a:xfrm>
-            <a:off x="1325880" y="5788152"/>
-            <a:ext cx="10424160" cy="667512"/>
+          <p:cNvPr id="20" name="Text 18"/>
+          <p:cNvSpPr txBox="1"/>
+          <p:nvPr/>
+        </p:nvSpPr>
+        <p:spPr>
+          <a:xfrm>
+            <a:off x="1325880" y="5870448"/>
+            <a:ext cx="10424160" cy="585216"/>
           </a:xfrm>
           <a:prstGeom prst="rect">
             <a:avLst/>
@@ -4067,7 +4145,7 @@
       </p:sp>
       <p:sp>
         <p:nvSpPr>
-          <p:cNvPr id="20" name="Shape 18"/>
+          <p:cNvPr id="21" name="Shape 19"/>
           <p:cNvSpPr/>
           <p:nvPr/>
         </p:nvSpPr>
@@ -4089,7 +4167,7 @@
       </p:sp>
       <p:sp>
         <p:nvSpPr>
-          <p:cNvPr id="21" name="Text 19"/>
+          <p:cNvPr id="22" name="Text 20"/>
           <p:cNvSpPr txBox="1"/>
           <p:nvPr/>
         </p:nvSpPr>
@@ -4128,7 +4206,7 @@
       </p:sp>
       <p:sp>
         <p:nvSpPr>
-          <p:cNvPr id="22" name="Text 20"/>
+          <p:cNvPr id="23" name="Text 21"/>
           <p:cNvSpPr txBox="1"/>
           <p:nvPr/>
         </p:nvSpPr>
@@ -4167,7 +4245,7 @@
       </p:sp>
       <p:sp>
         <p:nvSpPr>
-          <p:cNvPr id="23" name="Text 21"/>
+          <p:cNvPr id="24" name="Text 22"/>
           <p:cNvSpPr txBox="1"/>
           <p:nvPr/>
         </p:nvSpPr>
@@ -5697,7 +5775,7 @@
     <p:bg>
       <p:bgPr>
         <a:solidFill>
-          <a:srgbClr val="281C16"/>
+          <a:srgbClr val="301A12"/>
         </a:solidFill>
       </p:bgPr>
     </p:bg>
@@ -5723,12 +5801,12 @@
         </p:nvSpPr>
         <p:spPr>
           <a:xfrm>
-            <a:off x="10588752" y="502920"/>
-            <a:ext cx="1051560" cy="384048"/>
+            <a:off x="10405872" y="457200"/>
+            <a:ext cx="1234440" cy="457200"/>
           </a:xfrm>
           <a:prstGeom prst="roundRect">
             <a:avLst>
-              <a:gd name="adj" fmla="val 47619"/>
+              <a:gd name="adj" fmla="val 20000"/>
             </a:avLst>
           </a:prstGeom>
           <a:solidFill>
@@ -5745,8 +5823,8 @@
         </p:nvSpPr>
         <p:spPr>
           <a:xfrm>
-            <a:off x="10588752" y="502920"/>
-            <a:ext cx="1051560" cy="384048"/>
+            <a:off x="10405872" y="457200"/>
+            <a:ext cx="1234440" cy="457200"/>
           </a:xfrm>
           <a:prstGeom prst="rect">
             <a:avLst/>
@@ -5762,17 +5840,17 @@
               <a:buNone/>
             </a:pPr>
             <a:r>
-              <a:rPr lang="en-US" sz="1300" b="1" spc="200" kern="0" dirty="0">
-                <a:solidFill>
-                  <a:srgbClr val="281C16"/>
+              <a:rPr lang="en-US" sz="1400" b="1" spc="200" kern="0" dirty="0">
+                <a:solidFill>
+                  <a:srgbClr val="301A12"/>
                 </a:solidFill>
                 <a:latin typeface="Courier New" pitchFamily="34" charset="0"/>
                 <a:ea typeface="Courier New" pitchFamily="34" charset="-122"/>
                 <a:cs typeface="Courier New" pitchFamily="34" charset="-120"/>
               </a:rPr>
-              <a:t>GIT</a:t>
-            </a:r>
-            <a:endParaRPr lang="en-US" sz="1300" dirty="0"/>
+              <a:t>● GIT</a:t>
+            </a:r>
+            <a:endParaRPr lang="en-US" sz="1400" dirty="0"/>
           </a:p>
         </p:txBody>
       </p:sp>
@@ -5842,7 +5920,7 @@
             <a:r>
               <a:rPr lang="en-US" sz="3400" b="1" dirty="0">
                 <a:solidFill>
-                  <a:srgbClr val="C0CAF5"/>
+                  <a:srgbClr val="F6E6DB"/>
                 </a:solidFill>
                 <a:latin typeface="Calibri" pitchFamily="34" charset="0"/>
                 <a:ea typeface="Calibri" pitchFamily="34" charset="-122"/>
@@ -5901,7 +5979,7 @@
             <a:r>
               <a:rPr lang="en-US" sz="1800" b="1" dirty="0">
                 <a:solidFill>
-                  <a:srgbClr val="1A1B26"/>
+                  <a:srgbClr val="301A12"/>
                 </a:solidFill>
                 <a:latin typeface="Courier New" pitchFamily="34" charset="0"/>
                 <a:ea typeface="Courier New" pitchFamily="34" charset="-122"/>
@@ -5940,7 +6018,7 @@
             <a:r>
               <a:rPr lang="en-US" sz="1700" b="1" dirty="0">
                 <a:solidFill>
-                  <a:srgbClr val="C0CAF5"/>
+                  <a:srgbClr val="F6E6DB"/>
                 </a:solidFill>
                 <a:latin typeface="Calibri" pitchFamily="34" charset="0"/>
                 <a:ea typeface="Calibri" pitchFamily="34" charset="-122"/>
@@ -5979,7 +6057,7 @@
             <a:r>
               <a:rPr lang="en-US" sz="1350" dirty="0">
                 <a:solidFill>
-                  <a:srgbClr val="A9B1D6"/>
+                  <a:srgbClr val="E0C6B6"/>
                 </a:solidFill>
                 <a:latin typeface="Calibri" pitchFamily="34" charset="0"/>
                 <a:ea typeface="Calibri" pitchFamily="34" charset="-122"/>
@@ -6038,7 +6116,7 @@
             <a:r>
               <a:rPr lang="en-US" sz="1800" b="1" dirty="0">
                 <a:solidFill>
-                  <a:srgbClr val="1A1B26"/>
+                  <a:srgbClr val="301A12"/>
                 </a:solidFill>
                 <a:latin typeface="Courier New" pitchFamily="34" charset="0"/>
                 <a:ea typeface="Courier New" pitchFamily="34" charset="-122"/>
@@ -6077,7 +6155,7 @@
             <a:r>
               <a:rPr lang="en-US" sz="1700" b="1" dirty="0">
                 <a:solidFill>
-                  <a:srgbClr val="C0CAF5"/>
+                  <a:srgbClr val="F6E6DB"/>
                 </a:solidFill>
                 <a:latin typeface="Calibri" pitchFamily="34" charset="0"/>
                 <a:ea typeface="Calibri" pitchFamily="34" charset="-122"/>
@@ -6116,7 +6194,7 @@
             <a:r>
               <a:rPr lang="en-US" sz="1350" dirty="0">
                 <a:solidFill>
-                  <a:srgbClr val="A9B1D6"/>
+                  <a:srgbClr val="E0C6B6"/>
                 </a:solidFill>
                 <a:latin typeface="Calibri" pitchFamily="34" charset="0"/>
                 <a:ea typeface="Calibri" pitchFamily="34" charset="-122"/>
@@ -6175,7 +6253,7 @@
             <a:r>
               <a:rPr lang="en-US" sz="1800" b="1" dirty="0">
                 <a:solidFill>
-                  <a:srgbClr val="1A1B26"/>
+                  <a:srgbClr val="301A12"/>
                 </a:solidFill>
                 <a:latin typeface="Courier New" pitchFamily="34" charset="0"/>
                 <a:ea typeface="Courier New" pitchFamily="34" charset="-122"/>
@@ -6214,7 +6292,7 @@
             <a:r>
               <a:rPr lang="en-US" sz="1700" b="1" dirty="0">
                 <a:solidFill>
-                  <a:srgbClr val="C0CAF5"/>
+                  <a:srgbClr val="F6E6DB"/>
                 </a:solidFill>
                 <a:latin typeface="Calibri" pitchFamily="34" charset="0"/>
                 <a:ea typeface="Calibri" pitchFamily="34" charset="-122"/>
@@ -6253,7 +6331,7 @@
             <a:r>
               <a:rPr lang="en-US" sz="1350" dirty="0">
                 <a:solidFill>
-                  <a:srgbClr val="A9B1D6"/>
+                  <a:srgbClr val="E0C6B6"/>
                 </a:solidFill>
                 <a:latin typeface="Calibri" pitchFamily="34" charset="0"/>
                 <a:ea typeface="Calibri" pitchFamily="34" charset="-122"/>
@@ -6312,7 +6390,7 @@
             <a:r>
               <a:rPr lang="en-US" sz="1800" b="1" dirty="0">
                 <a:solidFill>
-                  <a:srgbClr val="1A1B26"/>
+                  <a:srgbClr val="301A12"/>
                 </a:solidFill>
                 <a:latin typeface="Courier New" pitchFamily="34" charset="0"/>
                 <a:ea typeface="Courier New" pitchFamily="34" charset="-122"/>
@@ -6351,7 +6429,7 @@
             <a:r>
               <a:rPr lang="en-US" sz="1700" b="1" dirty="0">
                 <a:solidFill>
-                  <a:srgbClr val="C0CAF5"/>
+                  <a:srgbClr val="F6E6DB"/>
                 </a:solidFill>
                 <a:latin typeface="Calibri" pitchFamily="34" charset="0"/>
                 <a:ea typeface="Calibri" pitchFamily="34" charset="-122"/>
@@ -6390,7 +6468,7 @@
             <a:r>
               <a:rPr lang="en-US" sz="1350" dirty="0">
                 <a:solidFill>
-                  <a:srgbClr val="A9B1D6"/>
+                  <a:srgbClr val="E0C6B6"/>
                 </a:solidFill>
                 <a:latin typeface="Calibri" pitchFamily="34" charset="0"/>
                 <a:ea typeface="Calibri" pitchFamily="34" charset="-122"/>
@@ -6555,7 +6633,7 @@
     <p:bg>
       <p:bgPr>
         <a:solidFill>
-          <a:srgbClr val="281C16"/>
+          <a:srgbClr val="301A12"/>
         </a:solidFill>
       </p:bgPr>
     </p:bg>
@@ -6581,12 +6659,12 @@
         </p:nvSpPr>
         <p:spPr>
           <a:xfrm>
-            <a:off x="10588752" y="502920"/>
-            <a:ext cx="1051560" cy="384048"/>
+            <a:off x="10405872" y="457200"/>
+            <a:ext cx="1234440" cy="457200"/>
           </a:xfrm>
           <a:prstGeom prst="roundRect">
             <a:avLst>
-              <a:gd name="adj" fmla="val 47619"/>
+              <a:gd name="adj" fmla="val 20000"/>
             </a:avLst>
           </a:prstGeom>
           <a:solidFill>
@@ -6603,8 +6681,8 @@
         </p:nvSpPr>
         <p:spPr>
           <a:xfrm>
-            <a:off x="10588752" y="502920"/>
-            <a:ext cx="1051560" cy="384048"/>
+            <a:off x="10405872" y="457200"/>
+            <a:ext cx="1234440" cy="457200"/>
           </a:xfrm>
           <a:prstGeom prst="rect">
             <a:avLst/>
@@ -6620,17 +6698,17 @@
               <a:buNone/>
             </a:pPr>
             <a:r>
-              <a:rPr lang="en-US" sz="1300" b="1" spc="200" kern="0" dirty="0">
-                <a:solidFill>
-                  <a:srgbClr val="281C16"/>
+              <a:rPr lang="en-US" sz="1400" b="1" spc="200" kern="0" dirty="0">
+                <a:solidFill>
+                  <a:srgbClr val="301A12"/>
                 </a:solidFill>
                 <a:latin typeface="Courier New" pitchFamily="34" charset="0"/>
                 <a:ea typeface="Courier New" pitchFamily="34" charset="-122"/>
                 <a:cs typeface="Courier New" pitchFamily="34" charset="-120"/>
               </a:rPr>
-              <a:t>GIT</a:t>
-            </a:r>
-            <a:endParaRPr lang="en-US" sz="1300" dirty="0"/>
+              <a:t>● GIT</a:t>
+            </a:r>
+            <a:endParaRPr lang="en-US" sz="1400" dirty="0"/>
           </a:p>
         </p:txBody>
       </p:sp>
@@ -6700,7 +6778,7 @@
             <a:r>
               <a:rPr lang="en-US" sz="3400" b="1" dirty="0">
                 <a:solidFill>
-                  <a:srgbClr val="C0CAF5"/>
+                  <a:srgbClr val="F6E6DB"/>
                 </a:solidFill>
                 <a:latin typeface="Calibri" pitchFamily="34" charset="0"/>
                 <a:ea typeface="Calibri" pitchFamily="34" charset="-122"/>
@@ -6743,7 +6821,7 @@
             <a:r>
               <a:rPr lang="en-US" sz="1600" dirty="0">
                 <a:solidFill>
-                  <a:srgbClr val="A9B1D6"/>
+                  <a:srgbClr val="E0C6B6"/>
                 </a:solidFill>
                 <a:latin typeface="Calibri" pitchFamily="34" charset="0"/>
                 <a:ea typeface="Calibri" pitchFamily="34" charset="-122"/>
@@ -6764,7 +6842,7 @@
             <a:r>
               <a:rPr lang="en-US" sz="1600" dirty="0">
                 <a:solidFill>
-                  <a:srgbClr val="A9B1D6"/>
+                  <a:srgbClr val="E0C6B6"/>
                 </a:solidFill>
                 <a:latin typeface="Calibri" pitchFamily="34" charset="0"/>
                 <a:ea typeface="Calibri" pitchFamily="34" charset="-122"/>
@@ -6785,7 +6863,7 @@
             <a:r>
               <a:rPr lang="en-US" sz="1600" dirty="0">
                 <a:solidFill>
-                  <a:srgbClr val="A9B1D6"/>
+                  <a:srgbClr val="E0C6B6"/>
                 </a:solidFill>
                 <a:latin typeface="Calibri" pitchFamily="34" charset="0"/>
                 <a:ea typeface="Calibri" pitchFamily="34" charset="-122"/>
@@ -6806,7 +6884,7 @@
             <a:r>
               <a:rPr lang="en-US" sz="1600" dirty="0">
                 <a:solidFill>
-                  <a:srgbClr val="A9B1D6"/>
+                  <a:srgbClr val="E0C6B6"/>
                 </a:solidFill>
                 <a:latin typeface="Calibri" pitchFamily="34" charset="0"/>
                 <a:ea typeface="Calibri" pitchFamily="34" charset="-122"/>
@@ -6835,7 +6913,7 @@
             </a:avLst>
           </a:prstGeom>
           <a:solidFill>
-            <a:srgbClr val="24283B"/>
+            <a:srgbClr val="3E2418"/>
           </a:solidFill>
           <a:ln w="15875">
             <a:solidFill>
@@ -6913,7 +6991,7 @@
         <p:spPr>
           <a:xfrm>
             <a:off x="7269480" y="3108960"/>
-            <a:ext cx="4160520" cy="2286000"/>
+            <a:ext cx="4160520" cy="2194560"/>
           </a:xfrm>
           <a:prstGeom prst="rect">
             <a:avLst/>
@@ -6931,7 +7009,7 @@
             <a:r>
               <a:rPr lang="en-US" sz="1600" dirty="0">
                 <a:solidFill>
-                  <a:srgbClr val="C0CAF5"/>
+                  <a:srgbClr val="F6E6DB"/>
                 </a:solidFill>
                 <a:latin typeface="Calibri" pitchFamily="34" charset="0"/>
                 <a:ea typeface="Calibri" pitchFamily="34" charset="-122"/>
@@ -7200,8 +7278,47 @@
         </p:nvSpPr>
         <p:spPr>
           <a:xfrm>
-            <a:off x="548640" y="2011680"/>
-            <a:ext cx="6126480" cy="3840480"/>
+            <a:off x="548640" y="1627632"/>
+            <a:ext cx="10881360" cy="502920"/>
+          </a:xfrm>
+          <a:prstGeom prst="rect">
+            <a:avLst/>
+          </a:prstGeom>
+          <a:noFill/>
+          <a:ln/>
+        </p:spPr>
+        <p:txBody>
+          <a:bodyPr wrap="square" lIns="0" tIns="0" rIns="0" bIns="0" rtlCol="0" anchor="t"/>
+          <a:lstStyle/>
+          <a:p>
+            <a:pPr algn="l" indent="0" marL="0">
+              <a:buNone/>
+            </a:pPr>
+            <a:r>
+              <a:rPr lang="en-US" sz="1500" dirty="0">
+                <a:solidFill>
+                  <a:srgbClr val="A9B1D6"/>
+                </a:solidFill>
+                <a:latin typeface="Calibri" pitchFamily="34" charset="0"/>
+                <a:ea typeface="Calibri" pitchFamily="34" charset="-122"/>
+                <a:cs typeface="Calibri" pitchFamily="34" charset="-120"/>
+              </a:rPr>
+              <a:t>The same lesson as retrieval, extended: what the model can do and what it remembers are also context you design.</a:t>
+            </a:r>
+            <a:endParaRPr lang="en-US" sz="1500" dirty="0"/>
+          </a:p>
+        </p:txBody>
+      </p:sp>
+      <p:sp>
+        <p:nvSpPr>
+          <p:cNvPr id="5" name="Text 3"/>
+          <p:cNvSpPr txBox="1"/>
+          <p:nvPr/>
+        </p:nvSpPr>
+        <p:spPr>
+          <a:xfrm>
+            <a:off x="548640" y="2340864"/>
+            <a:ext cx="6126480" cy="3511296"/>
           </a:xfrm>
           <a:prstGeom prst="rect">
             <a:avLst/>
@@ -7339,18 +7456,18 @@
       </p:sp>
       <p:sp>
         <p:nvSpPr>
-          <p:cNvPr id="5" name="Shape 3"/>
+          <p:cNvPr id="6" name="Shape 4"/>
           <p:cNvSpPr/>
           <p:nvPr/>
         </p:nvSpPr>
         <p:spPr>
           <a:xfrm>
-            <a:off x="6995160" y="2148840"/>
-            <a:ext cx="4645152" cy="3383280"/>
+            <a:off x="6995160" y="2478024"/>
+            <a:ext cx="4645152" cy="3054096"/>
           </a:xfrm>
           <a:prstGeom prst="roundRect">
             <a:avLst>
-              <a:gd name="adj" fmla="val 2432"/>
+              <a:gd name="adj" fmla="val 2695"/>
             </a:avLst>
           </a:prstGeom>
           <a:solidFill>
@@ -7366,13 +7483,13 @@
       </p:sp>
       <p:sp>
         <p:nvSpPr>
-          <p:cNvPr id="6" name="Shape 4"/>
+          <p:cNvPr id="7" name="Shape 5"/>
           <p:cNvSpPr/>
           <p:nvPr/>
         </p:nvSpPr>
         <p:spPr>
           <a:xfrm>
-            <a:off x="7269480" y="2423160"/>
+            <a:off x="7269480" y="2752344"/>
             <a:ext cx="457200" cy="457200"/>
           </a:xfrm>
           <a:prstGeom prst="ellipse">
@@ -7386,13 +7503,13 @@
       </p:sp>
       <p:sp>
         <p:nvSpPr>
-          <p:cNvPr id="7" name="Text 5"/>
-          <p:cNvSpPr txBox="1"/>
-          <p:nvPr/>
-        </p:nvSpPr>
-        <p:spPr>
-          <a:xfrm>
-            <a:off x="7818120" y="2450592"/>
+          <p:cNvPr id="8" name="Text 6"/>
+          <p:cNvSpPr txBox="1"/>
+          <p:nvPr/>
+        </p:nvSpPr>
+        <p:spPr>
+          <a:xfrm>
+            <a:off x="7818120" y="2779776"/>
             <a:ext cx="3657600" cy="411480"/>
           </a:xfrm>
           <a:prstGeom prst="rect">
@@ -7425,14 +7542,14 @@
       </p:sp>
       <p:sp>
         <p:nvSpPr>
-          <p:cNvPr id="8" name="Text 6"/>
-          <p:cNvSpPr txBox="1"/>
-          <p:nvPr/>
-        </p:nvSpPr>
-        <p:spPr>
-          <a:xfrm>
-            <a:off x="7269480" y="3108960"/>
-            <a:ext cx="4160520" cy="2286000"/>
+          <p:cNvPr id="9" name="Text 7"/>
+          <p:cNvSpPr txBox="1"/>
+          <p:nvPr/>
+        </p:nvSpPr>
+        <p:spPr>
+          <a:xfrm>
+            <a:off x="7269480" y="3438144"/>
+            <a:ext cx="4160520" cy="1865376"/>
           </a:xfrm>
           <a:prstGeom prst="rect">
             <a:avLst/>
@@ -7464,7 +7581,7 @@
       </p:sp>
       <p:sp>
         <p:nvSpPr>
-          <p:cNvPr id="9" name="Shape 7"/>
+          <p:cNvPr id="10" name="Shape 8"/>
           <p:cNvSpPr/>
           <p:nvPr/>
         </p:nvSpPr>
@@ -7486,7 +7603,7 @@
       </p:sp>
       <p:sp>
         <p:nvSpPr>
-          <p:cNvPr id="10" name="Text 8"/>
+          <p:cNvPr id="11" name="Text 9"/>
           <p:cNvSpPr txBox="1"/>
           <p:nvPr/>
         </p:nvSpPr>
@@ -7525,7 +7642,7 @@
       </p:sp>
       <p:sp>
         <p:nvSpPr>
-          <p:cNvPr id="11" name="Text 9"/>
+          <p:cNvPr id="12" name="Text 10"/>
           <p:cNvSpPr txBox="1"/>
           <p:nvPr/>
         </p:nvSpPr>
@@ -7564,7 +7681,7 @@
       </p:sp>
       <p:sp>
         <p:nvSpPr>
-          <p:cNvPr id="12" name="Text 10"/>
+          <p:cNvPr id="13" name="Text 11"/>
           <p:cNvSpPr txBox="1"/>
           <p:nvPr/>
         </p:nvSpPr>
@@ -7719,8 +7836,47 @@
         </p:nvSpPr>
         <p:spPr>
           <a:xfrm>
-            <a:off x="548640" y="2057400"/>
-            <a:ext cx="4709160" cy="3749040"/>
+            <a:off x="548640" y="1627632"/>
+            <a:ext cx="10881360" cy="502920"/>
+          </a:xfrm>
+          <a:prstGeom prst="rect">
+            <a:avLst/>
+          </a:prstGeom>
+          <a:noFill/>
+          <a:ln/>
+        </p:spPr>
+        <p:txBody>
+          <a:bodyPr wrap="square" lIns="0" tIns="0" rIns="0" bIns="0" rtlCol="0" anchor="t"/>
+          <a:lstStyle/>
+          <a:p>
+            <a:pPr algn="l" indent="0" marL="0">
+              <a:buNone/>
+            </a:pPr>
+            <a:r>
+              <a:rPr lang="en-US" sz="1500" dirty="0">
+                <a:solidFill>
+                  <a:srgbClr val="A9B1D6"/>
+                </a:solidFill>
+                <a:latin typeface="Calibri" pitchFamily="34" charset="0"/>
+                <a:ea typeface="Calibri" pitchFamily="34" charset="-122"/>
+                <a:cs typeface="Calibri" pitchFamily="34" charset="-120"/>
+              </a:rPr>
+              <a:t>A tool is only as good as its description — because that description is all the model ever sees of it.</a:t>
+            </a:r>
+            <a:endParaRPr lang="en-US" sz="1500" dirty="0"/>
+          </a:p>
+        </p:txBody>
+      </p:sp>
+      <p:sp>
+        <p:nvSpPr>
+          <p:cNvPr id="5" name="Text 3"/>
+          <p:cNvSpPr txBox="1"/>
+          <p:nvPr/>
+        </p:nvSpPr>
+        <p:spPr>
+          <a:xfrm>
+            <a:off x="548640" y="2386584"/>
+            <a:ext cx="4709160" cy="3419856"/>
           </a:xfrm>
           <a:prstGeom prst="rect">
             <a:avLst/>
@@ -7858,18 +8014,18 @@
       </p:sp>
       <p:sp>
         <p:nvSpPr>
-          <p:cNvPr id="5" name="Shape 3"/>
+          <p:cNvPr id="6" name="Shape 4"/>
           <p:cNvSpPr/>
           <p:nvPr/>
         </p:nvSpPr>
         <p:spPr>
           <a:xfrm>
-            <a:off x="5532120" y="2057400"/>
-            <a:ext cx="6108192" cy="3794760"/>
+            <a:off x="5532120" y="2386584"/>
+            <a:ext cx="6108192" cy="3465576"/>
           </a:xfrm>
           <a:prstGeom prst="roundRect">
             <a:avLst>
-              <a:gd name="adj" fmla="val 1446"/>
+              <a:gd name="adj" fmla="val 1583"/>
             </a:avLst>
           </a:prstGeom>
           <a:solidFill>
@@ -7885,13 +8041,13 @@
       </p:sp>
       <p:sp>
         <p:nvSpPr>
-          <p:cNvPr id="6" name="Text 4"/>
-          <p:cNvSpPr txBox="1"/>
-          <p:nvPr/>
-        </p:nvSpPr>
-        <p:spPr>
-          <a:xfrm>
-            <a:off x="5760720" y="2194560"/>
+          <p:cNvPr id="7" name="Text 5"/>
+          <p:cNvSpPr txBox="1"/>
+          <p:nvPr/>
+        </p:nvSpPr>
+        <p:spPr>
+          <a:xfrm>
+            <a:off x="5760720" y="2523744"/>
             <a:ext cx="5650992" cy="320040"/>
           </a:xfrm>
           <a:prstGeom prst="rect">
@@ -7924,14 +8080,14 @@
       </p:sp>
       <p:sp>
         <p:nvSpPr>
-          <p:cNvPr id="7" name="Text 5"/>
-          <p:cNvSpPr txBox="1"/>
-          <p:nvPr/>
-        </p:nvSpPr>
-        <p:spPr>
-          <a:xfrm>
-            <a:off x="5788152" y="2560320"/>
-            <a:ext cx="5596128" cy="3108960"/>
+          <p:cNvPr id="8" name="Text 6"/>
+          <p:cNvSpPr txBox="1"/>
+          <p:nvPr/>
+        </p:nvSpPr>
+        <p:spPr>
+          <a:xfrm>
+            <a:off x="5788152" y="2889504"/>
+            <a:ext cx="5596128" cy="2779776"/>
           </a:xfrm>
           <a:prstGeom prst="rect">
             <a:avLst/>
@@ -8205,7 +8361,7 @@
       </p:sp>
       <p:sp>
         <p:nvSpPr>
-          <p:cNvPr id="8" name="Shape 6"/>
+          <p:cNvPr id="9" name="Shape 7"/>
           <p:cNvSpPr/>
           <p:nvPr/>
         </p:nvSpPr>
@@ -8227,7 +8383,7 @@
       </p:sp>
       <p:sp>
         <p:nvSpPr>
-          <p:cNvPr id="9" name="Text 7"/>
+          <p:cNvPr id="10" name="Text 8"/>
           <p:cNvSpPr txBox="1"/>
           <p:nvPr/>
         </p:nvSpPr>
@@ -8266,7 +8422,7 @@
       </p:sp>
       <p:sp>
         <p:nvSpPr>
-          <p:cNvPr id="10" name="Text 8"/>
+          <p:cNvPr id="11" name="Text 9"/>
           <p:cNvSpPr txBox="1"/>
           <p:nvPr/>
         </p:nvSpPr>
@@ -8305,7 +8461,7 @@
       </p:sp>
       <p:sp>
         <p:nvSpPr>
-          <p:cNvPr id="11" name="Text 9"/>
+          <p:cNvPr id="12" name="Text 10"/>
           <p:cNvSpPr txBox="1"/>
           <p:nvPr/>
         </p:nvSpPr>
@@ -8454,13 +8610,52 @@
       </p:sp>
       <p:sp>
         <p:nvSpPr>
-          <p:cNvPr id="4" name="Shape 2"/>
+          <p:cNvPr id="4" name="Text 2"/>
+          <p:cNvSpPr txBox="1"/>
+          <p:nvPr/>
+        </p:nvSpPr>
+        <p:spPr>
+          <a:xfrm>
+            <a:off x="548640" y="1627632"/>
+            <a:ext cx="10881360" cy="502920"/>
+          </a:xfrm>
+          <a:prstGeom prst="rect">
+            <a:avLst/>
+          </a:prstGeom>
+          <a:noFill/>
+          <a:ln/>
+        </p:spPr>
+        <p:txBody>
+          <a:bodyPr wrap="square" lIns="0" tIns="0" rIns="0" bIns="0" rtlCol="0" anchor="t"/>
+          <a:lstStyle/>
+          <a:p>
+            <a:pPr algn="l" indent="0" marL="0">
+              <a:buNone/>
+            </a:pPr>
+            <a:r>
+              <a:rPr lang="en-US" sz="1500" dirty="0">
+                <a:solidFill>
+                  <a:srgbClr val="A9B1D6"/>
+                </a:solidFill>
+                <a:latin typeface="Calibri" pitchFamily="34" charset="0"/>
+                <a:ea typeface="Calibri" pitchFamily="34" charset="-122"/>
+                <a:cs typeface="Calibri" pitchFamily="34" charset="-120"/>
+              </a:rPr>
+              <a:t>Here's the mechanic that trips people up: the model asks, but your code is what actually acts.</a:t>
+            </a:r>
+            <a:endParaRPr lang="en-US" sz="1500" dirty="0"/>
+          </a:p>
+        </p:txBody>
+      </p:sp>
+      <p:sp>
+        <p:nvSpPr>
+          <p:cNvPr id="5" name="Shape 3"/>
           <p:cNvSpPr/>
           <p:nvPr/>
         </p:nvSpPr>
         <p:spPr>
           <a:xfrm>
-            <a:off x="548640" y="2103120"/>
+            <a:off x="548640" y="2432304"/>
             <a:ext cx="530352" cy="530352"/>
           </a:xfrm>
           <a:prstGeom prst="ellipse">
@@ -8474,13 +8669,13 @@
       </p:sp>
       <p:sp>
         <p:nvSpPr>
-          <p:cNvPr id="5" name="Text 3"/>
-          <p:cNvSpPr txBox="1"/>
-          <p:nvPr/>
-        </p:nvSpPr>
-        <p:spPr>
-          <a:xfrm>
-            <a:off x="548640" y="2103120"/>
+          <p:cNvPr id="6" name="Text 4"/>
+          <p:cNvSpPr txBox="1"/>
+          <p:nvPr/>
+        </p:nvSpPr>
+        <p:spPr>
+          <a:xfrm>
+            <a:off x="548640" y="2432304"/>
             <a:ext cx="530352" cy="530352"/>
           </a:xfrm>
           <a:prstGeom prst="rect">
@@ -8513,13 +8708,13 @@
       </p:sp>
       <p:sp>
         <p:nvSpPr>
-          <p:cNvPr id="6" name="Text 4"/>
-          <p:cNvSpPr txBox="1"/>
-          <p:nvPr/>
-        </p:nvSpPr>
-        <p:spPr>
-          <a:xfrm>
-            <a:off x="1325880" y="2084832"/>
+          <p:cNvPr id="7" name="Text 5"/>
+          <p:cNvSpPr txBox="1"/>
+          <p:nvPr/>
+        </p:nvSpPr>
+        <p:spPr>
+          <a:xfrm>
+            <a:off x="1325880" y="2414016"/>
             <a:ext cx="10424160" cy="411480"/>
           </a:xfrm>
           <a:prstGeom prst="rect">
@@ -8552,14 +8747,14 @@
       </p:sp>
       <p:sp>
         <p:nvSpPr>
-          <p:cNvPr id="7" name="Text 5"/>
-          <p:cNvSpPr txBox="1"/>
-          <p:nvPr/>
-        </p:nvSpPr>
-        <p:spPr>
-          <a:xfrm>
-            <a:off x="1325880" y="2468880"/>
-            <a:ext cx="10424160" cy="667512"/>
+          <p:cNvPr id="8" name="Text 6"/>
+          <p:cNvSpPr txBox="1"/>
+          <p:nvPr/>
+        </p:nvSpPr>
+        <p:spPr>
+          <a:xfrm>
+            <a:off x="1325880" y="2798064"/>
+            <a:ext cx="10424160" cy="585216"/>
           </a:xfrm>
           <a:prstGeom prst="rect">
             <a:avLst/>
@@ -8591,13 +8786,13 @@
       </p:sp>
       <p:sp>
         <p:nvSpPr>
-          <p:cNvPr id="8" name="Shape 6"/>
+          <p:cNvPr id="9" name="Shape 7"/>
           <p:cNvSpPr/>
           <p:nvPr/>
         </p:nvSpPr>
         <p:spPr>
           <a:xfrm>
-            <a:off x="548640" y="3209544"/>
+            <a:off x="548640" y="3456432"/>
             <a:ext cx="530352" cy="530352"/>
           </a:xfrm>
           <a:prstGeom prst="ellipse">
@@ -8611,13 +8806,13 @@
       </p:sp>
       <p:sp>
         <p:nvSpPr>
-          <p:cNvPr id="9" name="Text 7"/>
-          <p:cNvSpPr txBox="1"/>
-          <p:nvPr/>
-        </p:nvSpPr>
-        <p:spPr>
-          <a:xfrm>
-            <a:off x="548640" y="3209544"/>
+          <p:cNvPr id="10" name="Text 8"/>
+          <p:cNvSpPr txBox="1"/>
+          <p:nvPr/>
+        </p:nvSpPr>
+        <p:spPr>
+          <a:xfrm>
+            <a:off x="548640" y="3456432"/>
             <a:ext cx="530352" cy="530352"/>
           </a:xfrm>
           <a:prstGeom prst="rect">
@@ -8650,13 +8845,13 @@
       </p:sp>
       <p:sp>
         <p:nvSpPr>
-          <p:cNvPr id="10" name="Text 8"/>
-          <p:cNvSpPr txBox="1"/>
-          <p:nvPr/>
-        </p:nvSpPr>
-        <p:spPr>
-          <a:xfrm>
-            <a:off x="1325880" y="3191256"/>
+          <p:cNvPr id="11" name="Text 9"/>
+          <p:cNvSpPr txBox="1"/>
+          <p:nvPr/>
+        </p:nvSpPr>
+        <p:spPr>
+          <a:xfrm>
+            <a:off x="1325880" y="3438144"/>
             <a:ext cx="10424160" cy="411480"/>
           </a:xfrm>
           <a:prstGeom prst="rect">
@@ -8689,14 +8884,14 @@
       </p:sp>
       <p:sp>
         <p:nvSpPr>
-          <p:cNvPr id="11" name="Text 9"/>
-          <p:cNvSpPr txBox="1"/>
-          <p:nvPr/>
-        </p:nvSpPr>
-        <p:spPr>
-          <a:xfrm>
-            <a:off x="1325880" y="3575304"/>
-            <a:ext cx="10424160" cy="667512"/>
+          <p:cNvPr id="12" name="Text 10"/>
+          <p:cNvSpPr txBox="1"/>
+          <p:nvPr/>
+        </p:nvSpPr>
+        <p:spPr>
+          <a:xfrm>
+            <a:off x="1325880" y="3822192"/>
+            <a:ext cx="10424160" cy="585216"/>
           </a:xfrm>
           <a:prstGeom prst="rect">
             <a:avLst/>
@@ -8728,13 +8923,13 @@
       </p:sp>
       <p:sp>
         <p:nvSpPr>
-          <p:cNvPr id="12" name="Shape 10"/>
+          <p:cNvPr id="13" name="Shape 11"/>
           <p:cNvSpPr/>
           <p:nvPr/>
         </p:nvSpPr>
         <p:spPr>
           <a:xfrm>
-            <a:off x="548640" y="4315968"/>
+            <a:off x="548640" y="4480560"/>
             <a:ext cx="530352" cy="530352"/>
           </a:xfrm>
           <a:prstGeom prst="ellipse">
@@ -8748,13 +8943,13 @@
       </p:sp>
       <p:sp>
         <p:nvSpPr>
-          <p:cNvPr id="13" name="Text 11"/>
-          <p:cNvSpPr txBox="1"/>
-          <p:nvPr/>
-        </p:nvSpPr>
-        <p:spPr>
-          <a:xfrm>
-            <a:off x="548640" y="4315968"/>
+          <p:cNvPr id="14" name="Text 12"/>
+          <p:cNvSpPr txBox="1"/>
+          <p:nvPr/>
+        </p:nvSpPr>
+        <p:spPr>
+          <a:xfrm>
+            <a:off x="548640" y="4480560"/>
             <a:ext cx="530352" cy="530352"/>
           </a:xfrm>
           <a:prstGeom prst="rect">
@@ -8787,13 +8982,13 @@
       </p:sp>
       <p:sp>
         <p:nvSpPr>
-          <p:cNvPr id="14" name="Text 12"/>
-          <p:cNvSpPr txBox="1"/>
-          <p:nvPr/>
-        </p:nvSpPr>
-        <p:spPr>
-          <a:xfrm>
-            <a:off x="1325880" y="4297680"/>
+          <p:cNvPr id="15" name="Text 13"/>
+          <p:cNvSpPr txBox="1"/>
+          <p:nvPr/>
+        </p:nvSpPr>
+        <p:spPr>
+          <a:xfrm>
+            <a:off x="1325880" y="4462272"/>
             <a:ext cx="10424160" cy="411480"/>
           </a:xfrm>
           <a:prstGeom prst="rect">
@@ -8826,14 +9021,14 @@
       </p:sp>
       <p:sp>
         <p:nvSpPr>
-          <p:cNvPr id="15" name="Text 13"/>
-          <p:cNvSpPr txBox="1"/>
-          <p:nvPr/>
-        </p:nvSpPr>
-        <p:spPr>
-          <a:xfrm>
-            <a:off x="1325880" y="4681728"/>
-            <a:ext cx="10424160" cy="667512"/>
+          <p:cNvPr id="16" name="Text 14"/>
+          <p:cNvSpPr txBox="1"/>
+          <p:nvPr/>
+        </p:nvSpPr>
+        <p:spPr>
+          <a:xfrm>
+            <a:off x="1325880" y="4846320"/>
+            <a:ext cx="10424160" cy="585216"/>
           </a:xfrm>
           <a:prstGeom prst="rect">
             <a:avLst/>
@@ -8865,13 +9060,13 @@
       </p:sp>
       <p:sp>
         <p:nvSpPr>
-          <p:cNvPr id="16" name="Shape 14"/>
+          <p:cNvPr id="17" name="Shape 15"/>
           <p:cNvSpPr/>
           <p:nvPr/>
         </p:nvSpPr>
         <p:spPr>
           <a:xfrm>
-            <a:off x="548640" y="5422392"/>
+            <a:off x="548640" y="5504688"/>
             <a:ext cx="530352" cy="530352"/>
           </a:xfrm>
           <a:prstGeom prst="ellipse">
@@ -8885,13 +9080,13 @@
       </p:sp>
       <p:sp>
         <p:nvSpPr>
-          <p:cNvPr id="17" name="Text 15"/>
-          <p:cNvSpPr txBox="1"/>
-          <p:nvPr/>
-        </p:nvSpPr>
-        <p:spPr>
-          <a:xfrm>
-            <a:off x="548640" y="5422392"/>
+          <p:cNvPr id="18" name="Text 16"/>
+          <p:cNvSpPr txBox="1"/>
+          <p:nvPr/>
+        </p:nvSpPr>
+        <p:spPr>
+          <a:xfrm>
+            <a:off x="548640" y="5504688"/>
             <a:ext cx="530352" cy="530352"/>
           </a:xfrm>
           <a:prstGeom prst="rect">
@@ -8924,13 +9119,13 @@
       </p:sp>
       <p:sp>
         <p:nvSpPr>
-          <p:cNvPr id="18" name="Text 16"/>
-          <p:cNvSpPr txBox="1"/>
-          <p:nvPr/>
-        </p:nvSpPr>
-        <p:spPr>
-          <a:xfrm>
-            <a:off x="1325880" y="5404104"/>
+          <p:cNvPr id="19" name="Text 17"/>
+          <p:cNvSpPr txBox="1"/>
+          <p:nvPr/>
+        </p:nvSpPr>
+        <p:spPr>
+          <a:xfrm>
+            <a:off x="1325880" y="5486400"/>
             <a:ext cx="10424160" cy="411480"/>
           </a:xfrm>
           <a:prstGeom prst="rect">
@@ -8963,14 +9158,14 @@
       </p:sp>
       <p:sp>
         <p:nvSpPr>
-          <p:cNvPr id="19" name="Text 17"/>
-          <p:cNvSpPr txBox="1"/>
-          <p:nvPr/>
-        </p:nvSpPr>
-        <p:spPr>
-          <a:xfrm>
-            <a:off x="1325880" y="5788152"/>
-            <a:ext cx="10424160" cy="667512"/>
+          <p:cNvPr id="20" name="Text 18"/>
+          <p:cNvSpPr txBox="1"/>
+          <p:nvPr/>
+        </p:nvSpPr>
+        <p:spPr>
+          <a:xfrm>
+            <a:off x="1325880" y="5870448"/>
+            <a:ext cx="10424160" cy="585216"/>
           </a:xfrm>
           <a:prstGeom prst="rect">
             <a:avLst/>
@@ -9002,7 +9197,7 @@
       </p:sp>
       <p:sp>
         <p:nvSpPr>
-          <p:cNvPr id="20" name="Shape 18"/>
+          <p:cNvPr id="21" name="Shape 19"/>
           <p:cNvSpPr/>
           <p:nvPr/>
         </p:nvSpPr>
@@ -9024,7 +9219,7 @@
       </p:sp>
       <p:sp>
         <p:nvSpPr>
-          <p:cNvPr id="21" name="Text 19"/>
+          <p:cNvPr id="22" name="Text 20"/>
           <p:cNvSpPr txBox="1"/>
           <p:nvPr/>
         </p:nvSpPr>
@@ -9063,7 +9258,7 @@
       </p:sp>
       <p:sp>
         <p:nvSpPr>
-          <p:cNvPr id="22" name="Text 20"/>
+          <p:cNvPr id="23" name="Text 21"/>
           <p:cNvSpPr txBox="1"/>
           <p:nvPr/>
         </p:nvSpPr>
@@ -9102,7 +9297,7 @@
       </p:sp>
       <p:sp>
         <p:nvSpPr>
-          <p:cNvPr id="23" name="Text 21"/>
+          <p:cNvPr id="24" name="Text 22"/>
           <p:cNvSpPr txBox="1"/>
           <p:nvPr/>
         </p:nvSpPr>
@@ -9257,8 +9452,47 @@
         </p:nvSpPr>
         <p:spPr>
           <a:xfrm>
-            <a:off x="548640" y="2011680"/>
-            <a:ext cx="6126480" cy="3840480"/>
+            <a:off x="548640" y="1627632"/>
+            <a:ext cx="10881360" cy="502920"/>
+          </a:xfrm>
+          <a:prstGeom prst="rect">
+            <a:avLst/>
+          </a:prstGeom>
+          <a:noFill/>
+          <a:ln/>
+        </p:spPr>
+        <p:txBody>
+          <a:bodyPr wrap="square" lIns="0" tIns="0" rIns="0" bIns="0" rtlCol="0" anchor="t"/>
+          <a:lstStyle/>
+          <a:p>
+            <a:pPr algn="l" indent="0" marL="0">
+              <a:buNone/>
+            </a:pPr>
+            <a:r>
+              <a:rPr lang="en-US" sz="1500" dirty="0">
+                <a:solidFill>
+                  <a:srgbClr val="A9B1D6"/>
+                </a:solidFill>
+                <a:latin typeface="Calibri" pitchFamily="34" charset="0"/>
+                <a:ea typeface="Calibri" pitchFamily="34" charset="-122"/>
+                <a:cs typeface="Calibri" pitchFamily="34" charset="-120"/>
+              </a:rPr>
+              <a:t>If you remember one thing about agents: when it picks the wrong tool, fix the words, not the wiring.</a:t>
+            </a:r>
+            <a:endParaRPr lang="en-US" sz="1500" dirty="0"/>
+          </a:p>
+        </p:txBody>
+      </p:sp>
+      <p:sp>
+        <p:nvSpPr>
+          <p:cNvPr id="5" name="Text 3"/>
+          <p:cNvSpPr txBox="1"/>
+          <p:nvPr/>
+        </p:nvSpPr>
+        <p:spPr>
+          <a:xfrm>
+            <a:off x="548640" y="2340864"/>
+            <a:ext cx="6126480" cy="3511296"/>
           </a:xfrm>
           <a:prstGeom prst="rect">
             <a:avLst/>
@@ -9396,18 +9630,18 @@
       </p:sp>
       <p:sp>
         <p:nvSpPr>
-          <p:cNvPr id="5" name="Shape 3"/>
+          <p:cNvPr id="6" name="Shape 4"/>
           <p:cNvSpPr/>
           <p:nvPr/>
         </p:nvSpPr>
         <p:spPr>
           <a:xfrm>
-            <a:off x="6995160" y="2148840"/>
-            <a:ext cx="4645152" cy="3383280"/>
+            <a:off x="6995160" y="2478024"/>
+            <a:ext cx="4645152" cy="3054096"/>
           </a:xfrm>
           <a:prstGeom prst="roundRect">
             <a:avLst>
-              <a:gd name="adj" fmla="val 2432"/>
+              <a:gd name="adj" fmla="val 2695"/>
             </a:avLst>
           </a:prstGeom>
           <a:solidFill>
@@ -9423,13 +9657,13 @@
       </p:sp>
       <p:sp>
         <p:nvSpPr>
-          <p:cNvPr id="6" name="Shape 4"/>
+          <p:cNvPr id="7" name="Shape 5"/>
           <p:cNvSpPr/>
           <p:nvPr/>
         </p:nvSpPr>
         <p:spPr>
           <a:xfrm>
-            <a:off x="7269480" y="2423160"/>
+            <a:off x="7269480" y="2752344"/>
             <a:ext cx="457200" cy="457200"/>
           </a:xfrm>
           <a:prstGeom prst="ellipse">
@@ -9443,13 +9677,13 @@
       </p:sp>
       <p:sp>
         <p:nvSpPr>
-          <p:cNvPr id="7" name="Text 5"/>
-          <p:cNvSpPr txBox="1"/>
-          <p:nvPr/>
-        </p:nvSpPr>
-        <p:spPr>
-          <a:xfrm>
-            <a:off x="7818120" y="2450592"/>
+          <p:cNvPr id="8" name="Text 6"/>
+          <p:cNvSpPr txBox="1"/>
+          <p:nvPr/>
+        </p:nvSpPr>
+        <p:spPr>
+          <a:xfrm>
+            <a:off x="7818120" y="2779776"/>
             <a:ext cx="3657600" cy="411480"/>
           </a:xfrm>
           <a:prstGeom prst="rect">
@@ -9482,14 +9716,14 @@
       </p:sp>
       <p:sp>
         <p:nvSpPr>
-          <p:cNvPr id="8" name="Text 6"/>
-          <p:cNvSpPr txBox="1"/>
-          <p:nvPr/>
-        </p:nvSpPr>
-        <p:spPr>
-          <a:xfrm>
-            <a:off x="7269480" y="3108960"/>
-            <a:ext cx="4160520" cy="2286000"/>
+          <p:cNvPr id="9" name="Text 7"/>
+          <p:cNvSpPr txBox="1"/>
+          <p:nvPr/>
+        </p:nvSpPr>
+        <p:spPr>
+          <a:xfrm>
+            <a:off x="7269480" y="3438144"/>
+            <a:ext cx="4160520" cy="1865376"/>
           </a:xfrm>
           <a:prstGeom prst="rect">
             <a:avLst/>
@@ -9521,7 +9755,7 @@
       </p:sp>
       <p:sp>
         <p:nvSpPr>
-          <p:cNvPr id="9" name="Shape 7"/>
+          <p:cNvPr id="10" name="Shape 8"/>
           <p:cNvSpPr/>
           <p:nvPr/>
         </p:nvSpPr>
@@ -9543,7 +9777,7 @@
       </p:sp>
       <p:sp>
         <p:nvSpPr>
-          <p:cNvPr id="10" name="Text 8"/>
+          <p:cNvPr id="11" name="Text 9"/>
           <p:cNvSpPr txBox="1"/>
           <p:nvPr/>
         </p:nvSpPr>
@@ -9582,7 +9816,7 @@
       </p:sp>
       <p:sp>
         <p:nvSpPr>
-          <p:cNvPr id="11" name="Text 9"/>
+          <p:cNvPr id="12" name="Text 10"/>
           <p:cNvSpPr txBox="1"/>
           <p:nvPr/>
         </p:nvSpPr>
@@ -9621,7 +9855,7 @@
       </p:sp>
       <p:sp>
         <p:nvSpPr>
-          <p:cNvPr id="12" name="Text 10"/>
+          <p:cNvPr id="13" name="Text 11"/>
           <p:cNvSpPr txBox="1"/>
           <p:nvPr/>
         </p:nvSpPr>
@@ -9770,13 +10004,52 @@
       </p:sp>
       <p:sp>
         <p:nvSpPr>
-          <p:cNvPr id="4" name="Shape 2"/>
+          <p:cNvPr id="4" name="Text 2"/>
+          <p:cNvSpPr txBox="1"/>
+          <p:nvPr/>
+        </p:nvSpPr>
+        <p:spPr>
+          <a:xfrm>
+            <a:off x="548640" y="1627632"/>
+            <a:ext cx="10881360" cy="502920"/>
+          </a:xfrm>
+          <a:prstGeom prst="rect">
+            <a:avLst/>
+          </a:prstGeom>
+          <a:noFill/>
+          <a:ln/>
+        </p:spPr>
+        <p:txBody>
+          <a:bodyPr wrap="square" lIns="0" tIns="0" rIns="0" bIns="0" rtlCol="0" anchor="t"/>
+          <a:lstStyle/>
+          <a:p>
+            <a:pPr algn="l" indent="0" marL="0">
+              <a:buNone/>
+            </a:pPr>
+            <a:r>
+              <a:rPr lang="en-US" sz="1500" dirty="0">
+                <a:solidFill>
+                  <a:srgbClr val="A9B1D6"/>
+                </a:solidFill>
+                <a:latin typeface="Calibri" pitchFamily="34" charset="0"/>
+                <a:ea typeface="Calibri" pitchFamily="34" charset="-122"/>
+                <a:cs typeface="Calibri" pitchFamily="34" charset="-120"/>
+              </a:rPr>
+              <a:t>Memory isn't a database you dump into — it's a careful choice about what's worth carrying forward.</a:t>
+            </a:r>
+            <a:endParaRPr lang="en-US" sz="1500" dirty="0"/>
+          </a:p>
+        </p:txBody>
+      </p:sp>
+      <p:sp>
+        <p:nvSpPr>
+          <p:cNvPr id="5" name="Shape 3"/>
           <p:cNvSpPr/>
           <p:nvPr/>
         </p:nvSpPr>
         <p:spPr>
           <a:xfrm>
-            <a:off x="548640" y="2103120"/>
+            <a:off x="548640" y="2432304"/>
             <a:ext cx="5394960" cy="1810512"/>
           </a:xfrm>
           <a:prstGeom prst="roundRect">
@@ -9797,13 +10070,13 @@
       </p:sp>
       <p:sp>
         <p:nvSpPr>
-          <p:cNvPr id="5" name="Shape 3"/>
+          <p:cNvPr id="6" name="Shape 4"/>
           <p:cNvSpPr/>
           <p:nvPr/>
         </p:nvSpPr>
         <p:spPr>
           <a:xfrm>
-            <a:off x="822960" y="2395728"/>
+            <a:off x="822960" y="2724912"/>
             <a:ext cx="548640" cy="548640"/>
           </a:xfrm>
           <a:prstGeom prst="ellipse">
@@ -9817,13 +10090,13 @@
       </p:sp>
       <p:sp>
         <p:nvSpPr>
-          <p:cNvPr id="6" name="Text 4"/>
-          <p:cNvSpPr txBox="1"/>
-          <p:nvPr/>
-        </p:nvSpPr>
-        <p:spPr>
-          <a:xfrm>
-            <a:off x="822960" y="2395728"/>
+          <p:cNvPr id="7" name="Text 5"/>
+          <p:cNvSpPr txBox="1"/>
+          <p:nvPr/>
+        </p:nvSpPr>
+        <p:spPr>
+          <a:xfrm>
+            <a:off x="822960" y="2724912"/>
             <a:ext cx="548640" cy="548640"/>
           </a:xfrm>
           <a:prstGeom prst="rect">
@@ -9856,13 +10129,13 @@
       </p:sp>
       <p:sp>
         <p:nvSpPr>
-          <p:cNvPr id="7" name="Text 5"/>
-          <p:cNvSpPr txBox="1"/>
-          <p:nvPr/>
-        </p:nvSpPr>
-        <p:spPr>
-          <a:xfrm>
-            <a:off x="1508760" y="2359152"/>
+          <p:cNvPr id="8" name="Text 6"/>
+          <p:cNvSpPr txBox="1"/>
+          <p:nvPr/>
+        </p:nvSpPr>
+        <p:spPr>
+          <a:xfrm>
+            <a:off x="1508760" y="2688336"/>
             <a:ext cx="4206240" cy="548640"/>
           </a:xfrm>
           <a:prstGeom prst="rect">
@@ -9895,13 +10168,13 @@
       </p:sp>
       <p:sp>
         <p:nvSpPr>
-          <p:cNvPr id="8" name="Text 6"/>
-          <p:cNvSpPr txBox="1"/>
-          <p:nvPr/>
-        </p:nvSpPr>
-        <p:spPr>
-          <a:xfrm>
-            <a:off x="822960" y="3017520"/>
+          <p:cNvPr id="9" name="Text 7"/>
+          <p:cNvSpPr txBox="1"/>
+          <p:nvPr/>
+        </p:nvSpPr>
+        <p:spPr>
+          <a:xfrm>
+            <a:off x="822960" y="3346704"/>
             <a:ext cx="4846320" cy="822960"/>
           </a:xfrm>
           <a:prstGeom prst="rect">
@@ -9934,13 +10207,13 @@
       </p:sp>
       <p:sp>
         <p:nvSpPr>
-          <p:cNvPr id="9" name="Shape 7"/>
+          <p:cNvPr id="10" name="Shape 8"/>
           <p:cNvSpPr/>
           <p:nvPr/>
         </p:nvSpPr>
         <p:spPr>
           <a:xfrm>
-            <a:off x="6245352" y="2103120"/>
+            <a:off x="6245352" y="2432304"/>
             <a:ext cx="5394960" cy="1810512"/>
           </a:xfrm>
           <a:prstGeom prst="roundRect">
@@ -9961,13 +10234,13 @@
       </p:sp>
       <p:sp>
         <p:nvSpPr>
-          <p:cNvPr id="10" name="Shape 8"/>
+          <p:cNvPr id="11" name="Shape 9"/>
           <p:cNvSpPr/>
           <p:nvPr/>
         </p:nvSpPr>
         <p:spPr>
           <a:xfrm>
-            <a:off x="6519672" y="2395728"/>
+            <a:off x="6519672" y="2724912"/>
             <a:ext cx="548640" cy="548640"/>
           </a:xfrm>
           <a:prstGeom prst="ellipse">
@@ -9981,13 +10254,13 @@
       </p:sp>
       <p:sp>
         <p:nvSpPr>
-          <p:cNvPr id="11" name="Text 9"/>
-          <p:cNvSpPr txBox="1"/>
-          <p:nvPr/>
-        </p:nvSpPr>
-        <p:spPr>
-          <a:xfrm>
-            <a:off x="6519672" y="2395728"/>
+          <p:cNvPr id="12" name="Text 10"/>
+          <p:cNvSpPr txBox="1"/>
+          <p:nvPr/>
+        </p:nvSpPr>
+        <p:spPr>
+          <a:xfrm>
+            <a:off x="6519672" y="2724912"/>
             <a:ext cx="548640" cy="548640"/>
           </a:xfrm>
           <a:prstGeom prst="rect">
@@ -10020,13 +10293,13 @@
       </p:sp>
       <p:sp>
         <p:nvSpPr>
-          <p:cNvPr id="12" name="Text 10"/>
-          <p:cNvSpPr txBox="1"/>
-          <p:nvPr/>
-        </p:nvSpPr>
-        <p:spPr>
-          <a:xfrm>
-            <a:off x="7205472" y="2359152"/>
+          <p:cNvPr id="13" name="Text 11"/>
+          <p:cNvSpPr txBox="1"/>
+          <p:nvPr/>
+        </p:nvSpPr>
+        <p:spPr>
+          <a:xfrm>
+            <a:off x="7205472" y="2688336"/>
             <a:ext cx="4206240" cy="548640"/>
           </a:xfrm>
           <a:prstGeom prst="rect">
@@ -10059,13 +10332,13 @@
       </p:sp>
       <p:sp>
         <p:nvSpPr>
-          <p:cNvPr id="13" name="Text 11"/>
-          <p:cNvSpPr txBox="1"/>
-          <p:nvPr/>
-        </p:nvSpPr>
-        <p:spPr>
-          <a:xfrm>
-            <a:off x="6519672" y="3017520"/>
+          <p:cNvPr id="14" name="Text 12"/>
+          <p:cNvSpPr txBox="1"/>
+          <p:nvPr/>
+        </p:nvSpPr>
+        <p:spPr>
+          <a:xfrm>
+            <a:off x="6519672" y="3346704"/>
             <a:ext cx="4846320" cy="822960"/>
           </a:xfrm>
           <a:prstGeom prst="rect">
@@ -10098,13 +10371,13 @@
       </p:sp>
       <p:sp>
         <p:nvSpPr>
-          <p:cNvPr id="14" name="Shape 12"/>
+          <p:cNvPr id="15" name="Shape 13"/>
           <p:cNvSpPr/>
           <p:nvPr/>
         </p:nvSpPr>
         <p:spPr>
           <a:xfrm>
-            <a:off x="548640" y="4114800"/>
+            <a:off x="548640" y="4443984"/>
             <a:ext cx="5394960" cy="1810512"/>
           </a:xfrm>
           <a:prstGeom prst="roundRect">
@@ -10125,13 +10398,13 @@
       </p:sp>
       <p:sp>
         <p:nvSpPr>
-          <p:cNvPr id="15" name="Shape 13"/>
+          <p:cNvPr id="16" name="Shape 14"/>
           <p:cNvSpPr/>
           <p:nvPr/>
         </p:nvSpPr>
         <p:spPr>
           <a:xfrm>
-            <a:off x="822960" y="4407408"/>
+            <a:off x="822960" y="4736592"/>
             <a:ext cx="548640" cy="548640"/>
           </a:xfrm>
           <a:prstGeom prst="ellipse">
@@ -10145,13 +10418,13 @@
       </p:sp>
       <p:sp>
         <p:nvSpPr>
-          <p:cNvPr id="16" name="Text 14"/>
-          <p:cNvSpPr txBox="1"/>
-          <p:nvPr/>
-        </p:nvSpPr>
-        <p:spPr>
-          <a:xfrm>
-            <a:off x="822960" y="4407408"/>
+          <p:cNvPr id="17" name="Text 15"/>
+          <p:cNvSpPr txBox="1"/>
+          <p:nvPr/>
+        </p:nvSpPr>
+        <p:spPr>
+          <a:xfrm>
+            <a:off x="822960" y="4736592"/>
             <a:ext cx="548640" cy="548640"/>
           </a:xfrm>
           <a:prstGeom prst="rect">
@@ -10184,13 +10457,13 @@
       </p:sp>
       <p:sp>
         <p:nvSpPr>
-          <p:cNvPr id="17" name="Text 15"/>
-          <p:cNvSpPr txBox="1"/>
-          <p:nvPr/>
-        </p:nvSpPr>
-        <p:spPr>
-          <a:xfrm>
-            <a:off x="1508760" y="4370832"/>
+          <p:cNvPr id="18" name="Text 16"/>
+          <p:cNvSpPr txBox="1"/>
+          <p:nvPr/>
+        </p:nvSpPr>
+        <p:spPr>
+          <a:xfrm>
+            <a:off x="1508760" y="4700016"/>
             <a:ext cx="4206240" cy="548640"/>
           </a:xfrm>
           <a:prstGeom prst="rect">
@@ -10223,13 +10496,13 @@
       </p:sp>
       <p:sp>
         <p:nvSpPr>
-          <p:cNvPr id="18" name="Text 16"/>
-          <p:cNvSpPr txBox="1"/>
-          <p:nvPr/>
-        </p:nvSpPr>
-        <p:spPr>
-          <a:xfrm>
-            <a:off x="822960" y="5029200"/>
+          <p:cNvPr id="19" name="Text 17"/>
+          <p:cNvSpPr txBox="1"/>
+          <p:nvPr/>
+        </p:nvSpPr>
+        <p:spPr>
+          <a:xfrm>
+            <a:off x="822960" y="5358384"/>
             <a:ext cx="4846320" cy="822960"/>
           </a:xfrm>
           <a:prstGeom prst="rect">
@@ -10262,13 +10535,13 @@
       </p:sp>
       <p:sp>
         <p:nvSpPr>
-          <p:cNvPr id="19" name="Shape 17"/>
+          <p:cNvPr id="20" name="Shape 18"/>
           <p:cNvSpPr/>
           <p:nvPr/>
         </p:nvSpPr>
         <p:spPr>
           <a:xfrm>
-            <a:off x="6245352" y="4114800"/>
+            <a:off x="6245352" y="4443984"/>
             <a:ext cx="5394960" cy="1810512"/>
           </a:xfrm>
           <a:prstGeom prst="roundRect">
@@ -10289,13 +10562,13 @@
       </p:sp>
       <p:sp>
         <p:nvSpPr>
-          <p:cNvPr id="20" name="Shape 18"/>
+          <p:cNvPr id="21" name="Shape 19"/>
           <p:cNvSpPr/>
           <p:nvPr/>
         </p:nvSpPr>
         <p:spPr>
           <a:xfrm>
-            <a:off x="6519672" y="4407408"/>
+            <a:off x="6519672" y="4736592"/>
             <a:ext cx="548640" cy="548640"/>
           </a:xfrm>
           <a:prstGeom prst="ellipse">
@@ -10309,13 +10582,13 @@
       </p:sp>
       <p:sp>
         <p:nvSpPr>
-          <p:cNvPr id="21" name="Text 19"/>
-          <p:cNvSpPr txBox="1"/>
-          <p:nvPr/>
-        </p:nvSpPr>
-        <p:spPr>
-          <a:xfrm>
-            <a:off x="6519672" y="4407408"/>
+          <p:cNvPr id="22" name="Text 20"/>
+          <p:cNvSpPr txBox="1"/>
+          <p:nvPr/>
+        </p:nvSpPr>
+        <p:spPr>
+          <a:xfrm>
+            <a:off x="6519672" y="4736592"/>
             <a:ext cx="548640" cy="548640"/>
           </a:xfrm>
           <a:prstGeom prst="rect">
@@ -10348,13 +10621,13 @@
       </p:sp>
       <p:sp>
         <p:nvSpPr>
-          <p:cNvPr id="22" name="Text 20"/>
-          <p:cNvSpPr txBox="1"/>
-          <p:nvPr/>
-        </p:nvSpPr>
-        <p:spPr>
-          <a:xfrm>
-            <a:off x="7205472" y="4370832"/>
+          <p:cNvPr id="23" name="Text 21"/>
+          <p:cNvSpPr txBox="1"/>
+          <p:nvPr/>
+        </p:nvSpPr>
+        <p:spPr>
+          <a:xfrm>
+            <a:off x="7205472" y="4700016"/>
             <a:ext cx="4206240" cy="548640"/>
           </a:xfrm>
           <a:prstGeom prst="rect">
@@ -10387,13 +10660,13 @@
       </p:sp>
       <p:sp>
         <p:nvSpPr>
-          <p:cNvPr id="23" name="Text 21"/>
-          <p:cNvSpPr txBox="1"/>
-          <p:nvPr/>
-        </p:nvSpPr>
-        <p:spPr>
-          <a:xfrm>
-            <a:off x="6519672" y="5029200"/>
+          <p:cNvPr id="24" name="Text 22"/>
+          <p:cNvSpPr txBox="1"/>
+          <p:nvPr/>
+        </p:nvSpPr>
+        <p:spPr>
+          <a:xfrm>
+            <a:off x="6519672" y="5358384"/>
             <a:ext cx="4846320" cy="822960"/>
           </a:xfrm>
           <a:prstGeom prst="rect">
@@ -10426,7 +10699,7 @@
       </p:sp>
       <p:sp>
         <p:nvSpPr>
-          <p:cNvPr id="24" name="Shape 22"/>
+          <p:cNvPr id="25" name="Shape 23"/>
           <p:cNvSpPr/>
           <p:nvPr/>
         </p:nvSpPr>
@@ -10448,7 +10721,7 @@
       </p:sp>
       <p:sp>
         <p:nvSpPr>
-          <p:cNvPr id="25" name="Text 23"/>
+          <p:cNvPr id="26" name="Text 24"/>
           <p:cNvSpPr txBox="1"/>
           <p:nvPr/>
         </p:nvSpPr>
@@ -10487,7 +10760,7 @@
       </p:sp>
       <p:sp>
         <p:nvSpPr>
-          <p:cNvPr id="26" name="Text 24"/>
+          <p:cNvPr id="27" name="Text 25"/>
           <p:cNvSpPr txBox="1"/>
           <p:nvPr/>
         </p:nvSpPr>
@@ -10526,7 +10799,7 @@
       </p:sp>
       <p:sp>
         <p:nvSpPr>
-          <p:cNvPr id="27" name="Text 25"/>
+          <p:cNvPr id="28" name="Text 26"/>
           <p:cNvSpPr txBox="1"/>
           <p:nvPr/>
         </p:nvSpPr>
